--- a/宣道詩/(宣道詩25)惟獨耶穌.pptx
+++ b/宣道詩/(宣道詩25)惟獨耶穌.pptx
@@ -170,7 +170,7 @@
           <a:lstStyle/>
           <a:p>
             <a:r>
-              <a:rPr lang="en-US" altLang="zh-TW" smtClean="0"/>
+              <a:rPr lang="en-US" altLang="zh-TW"/>
               <a:t>Click to edit Master title style</a:t>
             </a:r>
             <a:endParaRPr lang="zh-TW" altLang="en-US"/>
@@ -289,7 +289,7 @@
           </a:lstStyle>
           <a:p>
             <a:r>
-              <a:rPr lang="en-US" altLang="zh-TW" smtClean="0"/>
+              <a:rPr lang="en-US" altLang="zh-TW"/>
               <a:t>Click to edit Master subtitle style</a:t>
             </a:r>
             <a:endParaRPr lang="zh-TW" altLang="en-US"/>
@@ -313,7 +313,7 @@
           <a:p>
             <a:fld id="{24D5CDFD-BD6B-479F-B265-2C7EDA856D3D}" type="datetimeFigureOut">
               <a:rPr lang="vi-VN" smtClean="0"/>
-              <a:t>08/07/2021</a:t>
+              <a:t>19/10/2024</a:t>
             </a:fld>
             <a:endParaRPr lang="vi-VN"/>
           </a:p>
@@ -407,7 +407,7 @@
           <a:lstStyle/>
           <a:p>
             <a:r>
-              <a:rPr lang="en-US" altLang="zh-TW" smtClean="0"/>
+              <a:rPr lang="en-US" altLang="zh-TW"/>
               <a:t>Click to edit Master title style</a:t>
             </a:r>
             <a:endParaRPr lang="zh-TW" altLang="en-US"/>
@@ -431,35 +431,35 @@
           <a:p>
             <a:pPr lvl="0"/>
             <a:r>
-              <a:rPr lang="en-US" altLang="zh-TW" smtClean="0"/>
+              <a:rPr lang="en-US" altLang="zh-TW"/>
               <a:t>Edit Master text styles</a:t>
             </a:r>
           </a:p>
           <a:p>
             <a:pPr lvl="1"/>
             <a:r>
-              <a:rPr lang="en-US" altLang="zh-TW" smtClean="0"/>
+              <a:rPr lang="en-US" altLang="zh-TW"/>
               <a:t>Second level</a:t>
             </a:r>
           </a:p>
           <a:p>
             <a:pPr lvl="2"/>
             <a:r>
-              <a:rPr lang="en-US" altLang="zh-TW" smtClean="0"/>
+              <a:rPr lang="en-US" altLang="zh-TW"/>
               <a:t>Third level</a:t>
             </a:r>
           </a:p>
           <a:p>
             <a:pPr lvl="3"/>
             <a:r>
-              <a:rPr lang="en-US" altLang="zh-TW" smtClean="0"/>
+              <a:rPr lang="en-US" altLang="zh-TW"/>
               <a:t>Fourth level</a:t>
             </a:r>
           </a:p>
           <a:p>
             <a:pPr lvl="4"/>
             <a:r>
-              <a:rPr lang="en-US" altLang="zh-TW" smtClean="0"/>
+              <a:rPr lang="en-US" altLang="zh-TW"/>
               <a:t>Fifth level</a:t>
             </a:r>
             <a:endParaRPr lang="zh-TW" altLang="en-US"/>
@@ -483,7 +483,7 @@
           <a:p>
             <a:fld id="{24D5CDFD-BD6B-479F-B265-2C7EDA856D3D}" type="datetimeFigureOut">
               <a:rPr lang="vi-VN" smtClean="0"/>
-              <a:t>08/07/2021</a:t>
+              <a:t>19/10/2024</a:t>
             </a:fld>
             <a:endParaRPr lang="vi-VN"/>
           </a:p>
@@ -582,7 +582,7 @@
           <a:lstStyle/>
           <a:p>
             <a:r>
-              <a:rPr lang="en-US" altLang="zh-TW" smtClean="0"/>
+              <a:rPr lang="en-US" altLang="zh-TW"/>
               <a:t>Click to edit Master title style</a:t>
             </a:r>
             <a:endParaRPr lang="zh-TW" altLang="en-US"/>
@@ -611,35 +611,35 @@
           <a:p>
             <a:pPr lvl="0"/>
             <a:r>
-              <a:rPr lang="en-US" altLang="zh-TW" smtClean="0"/>
+              <a:rPr lang="en-US" altLang="zh-TW"/>
               <a:t>Edit Master text styles</a:t>
             </a:r>
           </a:p>
           <a:p>
             <a:pPr lvl="1"/>
             <a:r>
-              <a:rPr lang="en-US" altLang="zh-TW" smtClean="0"/>
+              <a:rPr lang="en-US" altLang="zh-TW"/>
               <a:t>Second level</a:t>
             </a:r>
           </a:p>
           <a:p>
             <a:pPr lvl="2"/>
             <a:r>
-              <a:rPr lang="en-US" altLang="zh-TW" smtClean="0"/>
+              <a:rPr lang="en-US" altLang="zh-TW"/>
               <a:t>Third level</a:t>
             </a:r>
           </a:p>
           <a:p>
             <a:pPr lvl="3"/>
             <a:r>
-              <a:rPr lang="en-US" altLang="zh-TW" smtClean="0"/>
+              <a:rPr lang="en-US" altLang="zh-TW"/>
               <a:t>Fourth level</a:t>
             </a:r>
           </a:p>
           <a:p>
             <a:pPr lvl="4"/>
             <a:r>
-              <a:rPr lang="en-US" altLang="zh-TW" smtClean="0"/>
+              <a:rPr lang="en-US" altLang="zh-TW"/>
               <a:t>Fifth level</a:t>
             </a:r>
             <a:endParaRPr lang="zh-TW" altLang="en-US"/>
@@ -663,7 +663,7 @@
           <a:p>
             <a:fld id="{24D5CDFD-BD6B-479F-B265-2C7EDA856D3D}" type="datetimeFigureOut">
               <a:rPr lang="vi-VN" smtClean="0"/>
-              <a:t>08/07/2021</a:t>
+              <a:t>19/10/2024</a:t>
             </a:fld>
             <a:endParaRPr lang="vi-VN"/>
           </a:p>
@@ -757,7 +757,7 @@
           <a:lstStyle/>
           <a:p>
             <a:r>
-              <a:rPr lang="en-US" altLang="zh-TW" smtClean="0"/>
+              <a:rPr lang="en-US" altLang="zh-TW"/>
               <a:t>Click to edit Master title style</a:t>
             </a:r>
             <a:endParaRPr lang="zh-TW" altLang="en-US"/>
@@ -781,35 +781,35 @@
           <a:p>
             <a:pPr lvl="0"/>
             <a:r>
-              <a:rPr lang="en-US" altLang="zh-TW" smtClean="0"/>
+              <a:rPr lang="en-US" altLang="zh-TW"/>
               <a:t>Edit Master text styles</a:t>
             </a:r>
           </a:p>
           <a:p>
             <a:pPr lvl="1"/>
             <a:r>
-              <a:rPr lang="en-US" altLang="zh-TW" smtClean="0"/>
+              <a:rPr lang="en-US" altLang="zh-TW"/>
               <a:t>Second level</a:t>
             </a:r>
           </a:p>
           <a:p>
             <a:pPr lvl="2"/>
             <a:r>
-              <a:rPr lang="en-US" altLang="zh-TW" smtClean="0"/>
+              <a:rPr lang="en-US" altLang="zh-TW"/>
               <a:t>Third level</a:t>
             </a:r>
           </a:p>
           <a:p>
             <a:pPr lvl="3"/>
             <a:r>
-              <a:rPr lang="en-US" altLang="zh-TW" smtClean="0"/>
+              <a:rPr lang="en-US" altLang="zh-TW"/>
               <a:t>Fourth level</a:t>
             </a:r>
           </a:p>
           <a:p>
             <a:pPr lvl="4"/>
             <a:r>
-              <a:rPr lang="en-US" altLang="zh-TW" smtClean="0"/>
+              <a:rPr lang="en-US" altLang="zh-TW"/>
               <a:t>Fifth level</a:t>
             </a:r>
             <a:endParaRPr lang="zh-TW" altLang="en-US"/>
@@ -833,7 +833,7 @@
           <a:p>
             <a:fld id="{24D5CDFD-BD6B-479F-B265-2C7EDA856D3D}" type="datetimeFigureOut">
               <a:rPr lang="vi-VN" smtClean="0"/>
-              <a:t>08/07/2021</a:t>
+              <a:t>19/10/2024</a:t>
             </a:fld>
             <a:endParaRPr lang="vi-VN"/>
           </a:p>
@@ -936,7 +936,7 @@
           </a:lstStyle>
           <a:p>
             <a:r>
-              <a:rPr lang="en-US" altLang="zh-TW" smtClean="0"/>
+              <a:rPr lang="en-US" altLang="zh-TW"/>
               <a:t>Click to edit Master title style</a:t>
             </a:r>
             <a:endParaRPr lang="zh-TW" altLang="en-US"/>
@@ -1056,7 +1056,7 @@
           <a:p>
             <a:pPr lvl="0"/>
             <a:r>
-              <a:rPr lang="en-US" altLang="zh-TW" smtClean="0"/>
+              <a:rPr lang="en-US" altLang="zh-TW"/>
               <a:t>Edit Master text styles</a:t>
             </a:r>
           </a:p>
@@ -1079,7 +1079,7 @@
           <a:p>
             <a:fld id="{24D5CDFD-BD6B-479F-B265-2C7EDA856D3D}" type="datetimeFigureOut">
               <a:rPr lang="vi-VN" smtClean="0"/>
-              <a:t>08/07/2021</a:t>
+              <a:t>19/10/2024</a:t>
             </a:fld>
             <a:endParaRPr lang="vi-VN"/>
           </a:p>
@@ -1173,7 +1173,7 @@
           <a:lstStyle/>
           <a:p>
             <a:r>
-              <a:rPr lang="en-US" altLang="zh-TW" smtClean="0"/>
+              <a:rPr lang="en-US" altLang="zh-TW"/>
               <a:t>Click to edit Master title style</a:t>
             </a:r>
             <a:endParaRPr lang="zh-TW" altLang="en-US"/>
@@ -1230,35 +1230,35 @@
           <a:p>
             <a:pPr lvl="0"/>
             <a:r>
-              <a:rPr lang="en-US" altLang="zh-TW" smtClean="0"/>
+              <a:rPr lang="en-US" altLang="zh-TW"/>
               <a:t>Edit Master text styles</a:t>
             </a:r>
           </a:p>
           <a:p>
             <a:pPr lvl="1"/>
             <a:r>
-              <a:rPr lang="en-US" altLang="zh-TW" smtClean="0"/>
+              <a:rPr lang="en-US" altLang="zh-TW"/>
               <a:t>Second level</a:t>
             </a:r>
           </a:p>
           <a:p>
             <a:pPr lvl="2"/>
             <a:r>
-              <a:rPr lang="en-US" altLang="zh-TW" smtClean="0"/>
+              <a:rPr lang="en-US" altLang="zh-TW"/>
               <a:t>Third level</a:t>
             </a:r>
           </a:p>
           <a:p>
             <a:pPr lvl="3"/>
             <a:r>
-              <a:rPr lang="en-US" altLang="zh-TW" smtClean="0"/>
+              <a:rPr lang="en-US" altLang="zh-TW"/>
               <a:t>Fourth level</a:t>
             </a:r>
           </a:p>
           <a:p>
             <a:pPr lvl="4"/>
             <a:r>
-              <a:rPr lang="en-US" altLang="zh-TW" smtClean="0"/>
+              <a:rPr lang="en-US" altLang="zh-TW"/>
               <a:t>Fifth level</a:t>
             </a:r>
             <a:endParaRPr lang="zh-TW" altLang="en-US"/>
@@ -1315,35 +1315,35 @@
           <a:p>
             <a:pPr lvl="0"/>
             <a:r>
-              <a:rPr lang="en-US" altLang="zh-TW" smtClean="0"/>
+              <a:rPr lang="en-US" altLang="zh-TW"/>
               <a:t>Edit Master text styles</a:t>
             </a:r>
           </a:p>
           <a:p>
             <a:pPr lvl="1"/>
             <a:r>
-              <a:rPr lang="en-US" altLang="zh-TW" smtClean="0"/>
+              <a:rPr lang="en-US" altLang="zh-TW"/>
               <a:t>Second level</a:t>
             </a:r>
           </a:p>
           <a:p>
             <a:pPr lvl="2"/>
             <a:r>
-              <a:rPr lang="en-US" altLang="zh-TW" smtClean="0"/>
+              <a:rPr lang="en-US" altLang="zh-TW"/>
               <a:t>Third level</a:t>
             </a:r>
           </a:p>
           <a:p>
             <a:pPr lvl="3"/>
             <a:r>
-              <a:rPr lang="en-US" altLang="zh-TW" smtClean="0"/>
+              <a:rPr lang="en-US" altLang="zh-TW"/>
               <a:t>Fourth level</a:t>
             </a:r>
           </a:p>
           <a:p>
             <a:pPr lvl="4"/>
             <a:r>
-              <a:rPr lang="en-US" altLang="zh-TW" smtClean="0"/>
+              <a:rPr lang="en-US" altLang="zh-TW"/>
               <a:t>Fifth level</a:t>
             </a:r>
             <a:endParaRPr lang="zh-TW" altLang="en-US"/>
@@ -1367,7 +1367,7 @@
           <a:p>
             <a:fld id="{24D5CDFD-BD6B-479F-B265-2C7EDA856D3D}" type="datetimeFigureOut">
               <a:rPr lang="vi-VN" smtClean="0"/>
-              <a:t>08/07/2021</a:t>
+              <a:t>19/10/2024</a:t>
             </a:fld>
             <a:endParaRPr lang="vi-VN"/>
           </a:p>
@@ -1465,7 +1465,7 @@
           </a:lstStyle>
           <a:p>
             <a:r>
-              <a:rPr lang="en-US" altLang="zh-TW" smtClean="0"/>
+              <a:rPr lang="en-US" altLang="zh-TW"/>
               <a:t>Click to edit Master title style</a:t>
             </a:r>
             <a:endParaRPr lang="zh-TW" altLang="en-US"/>
@@ -1531,7 +1531,7 @@
           <a:p>
             <a:pPr lvl="0"/>
             <a:r>
-              <a:rPr lang="en-US" altLang="zh-TW" smtClean="0"/>
+              <a:rPr lang="en-US" altLang="zh-TW"/>
               <a:t>Edit Master text styles</a:t>
             </a:r>
           </a:p>
@@ -1587,35 +1587,35 @@
           <a:p>
             <a:pPr lvl="0"/>
             <a:r>
-              <a:rPr lang="en-US" altLang="zh-TW" smtClean="0"/>
+              <a:rPr lang="en-US" altLang="zh-TW"/>
               <a:t>Edit Master text styles</a:t>
             </a:r>
           </a:p>
           <a:p>
             <a:pPr lvl="1"/>
             <a:r>
-              <a:rPr lang="en-US" altLang="zh-TW" smtClean="0"/>
+              <a:rPr lang="en-US" altLang="zh-TW"/>
               <a:t>Second level</a:t>
             </a:r>
           </a:p>
           <a:p>
             <a:pPr lvl="2"/>
             <a:r>
-              <a:rPr lang="en-US" altLang="zh-TW" smtClean="0"/>
+              <a:rPr lang="en-US" altLang="zh-TW"/>
               <a:t>Third level</a:t>
             </a:r>
           </a:p>
           <a:p>
             <a:pPr lvl="3"/>
             <a:r>
-              <a:rPr lang="en-US" altLang="zh-TW" smtClean="0"/>
+              <a:rPr lang="en-US" altLang="zh-TW"/>
               <a:t>Fourth level</a:t>
             </a:r>
           </a:p>
           <a:p>
             <a:pPr lvl="4"/>
             <a:r>
-              <a:rPr lang="en-US" altLang="zh-TW" smtClean="0"/>
+              <a:rPr lang="en-US" altLang="zh-TW"/>
               <a:t>Fifth level</a:t>
             </a:r>
             <a:endParaRPr lang="zh-TW" altLang="en-US"/>
@@ -1681,7 +1681,7 @@
           <a:p>
             <a:pPr lvl="0"/>
             <a:r>
-              <a:rPr lang="en-US" altLang="zh-TW" smtClean="0"/>
+              <a:rPr lang="en-US" altLang="zh-TW"/>
               <a:t>Edit Master text styles</a:t>
             </a:r>
           </a:p>
@@ -1737,35 +1737,35 @@
           <a:p>
             <a:pPr lvl="0"/>
             <a:r>
-              <a:rPr lang="en-US" altLang="zh-TW" smtClean="0"/>
+              <a:rPr lang="en-US" altLang="zh-TW"/>
               <a:t>Edit Master text styles</a:t>
             </a:r>
           </a:p>
           <a:p>
             <a:pPr lvl="1"/>
             <a:r>
-              <a:rPr lang="en-US" altLang="zh-TW" smtClean="0"/>
+              <a:rPr lang="en-US" altLang="zh-TW"/>
               <a:t>Second level</a:t>
             </a:r>
           </a:p>
           <a:p>
             <a:pPr lvl="2"/>
             <a:r>
-              <a:rPr lang="en-US" altLang="zh-TW" smtClean="0"/>
+              <a:rPr lang="en-US" altLang="zh-TW"/>
               <a:t>Third level</a:t>
             </a:r>
           </a:p>
           <a:p>
             <a:pPr lvl="3"/>
             <a:r>
-              <a:rPr lang="en-US" altLang="zh-TW" smtClean="0"/>
+              <a:rPr lang="en-US" altLang="zh-TW"/>
               <a:t>Fourth level</a:t>
             </a:r>
           </a:p>
           <a:p>
             <a:pPr lvl="4"/>
             <a:r>
-              <a:rPr lang="en-US" altLang="zh-TW" smtClean="0"/>
+              <a:rPr lang="en-US" altLang="zh-TW"/>
               <a:t>Fifth level</a:t>
             </a:r>
             <a:endParaRPr lang="zh-TW" altLang="en-US"/>
@@ -1789,7 +1789,7 @@
           <a:p>
             <a:fld id="{24D5CDFD-BD6B-479F-B265-2C7EDA856D3D}" type="datetimeFigureOut">
               <a:rPr lang="vi-VN" smtClean="0"/>
-              <a:t>08/07/2021</a:t>
+              <a:t>19/10/2024</a:t>
             </a:fld>
             <a:endParaRPr lang="vi-VN"/>
           </a:p>
@@ -1883,7 +1883,7 @@
           <a:lstStyle/>
           <a:p>
             <a:r>
-              <a:rPr lang="en-US" altLang="zh-TW" smtClean="0"/>
+              <a:rPr lang="en-US" altLang="zh-TW"/>
               <a:t>Click to edit Master title style</a:t>
             </a:r>
             <a:endParaRPr lang="zh-TW" altLang="en-US"/>
@@ -1907,7 +1907,7 @@
           <a:p>
             <a:fld id="{24D5CDFD-BD6B-479F-B265-2C7EDA856D3D}" type="datetimeFigureOut">
               <a:rPr lang="vi-VN" smtClean="0"/>
-              <a:t>08/07/2021</a:t>
+              <a:t>19/10/2024</a:t>
             </a:fld>
             <a:endParaRPr lang="vi-VN"/>
           </a:p>
@@ -2002,7 +2002,7 @@
           <a:p>
             <a:fld id="{24D5CDFD-BD6B-479F-B265-2C7EDA856D3D}" type="datetimeFigureOut">
               <a:rPr lang="vi-VN" smtClean="0"/>
-              <a:t>08/07/2021</a:t>
+              <a:t>19/10/2024</a:t>
             </a:fld>
             <a:endParaRPr lang="vi-VN"/>
           </a:p>
@@ -2105,7 +2105,7 @@
           </a:lstStyle>
           <a:p>
             <a:r>
-              <a:rPr lang="en-US" altLang="zh-TW" smtClean="0"/>
+              <a:rPr lang="en-US" altLang="zh-TW"/>
               <a:t>Click to edit Master title style</a:t>
             </a:r>
             <a:endParaRPr lang="zh-TW" altLang="en-US"/>
@@ -2162,35 +2162,35 @@
           <a:p>
             <a:pPr lvl="0"/>
             <a:r>
-              <a:rPr lang="en-US" altLang="zh-TW" smtClean="0"/>
+              <a:rPr lang="en-US" altLang="zh-TW"/>
               <a:t>Edit Master text styles</a:t>
             </a:r>
           </a:p>
           <a:p>
             <a:pPr lvl="1"/>
             <a:r>
-              <a:rPr lang="en-US" altLang="zh-TW" smtClean="0"/>
+              <a:rPr lang="en-US" altLang="zh-TW"/>
               <a:t>Second level</a:t>
             </a:r>
           </a:p>
           <a:p>
             <a:pPr lvl="2"/>
             <a:r>
-              <a:rPr lang="en-US" altLang="zh-TW" smtClean="0"/>
+              <a:rPr lang="en-US" altLang="zh-TW"/>
               <a:t>Third level</a:t>
             </a:r>
           </a:p>
           <a:p>
             <a:pPr lvl="3"/>
             <a:r>
-              <a:rPr lang="en-US" altLang="zh-TW" smtClean="0"/>
+              <a:rPr lang="en-US" altLang="zh-TW"/>
               <a:t>Fourth level</a:t>
             </a:r>
           </a:p>
           <a:p>
             <a:pPr lvl="4"/>
             <a:r>
-              <a:rPr lang="en-US" altLang="zh-TW" smtClean="0"/>
+              <a:rPr lang="en-US" altLang="zh-TW"/>
               <a:t>Fifth level</a:t>
             </a:r>
             <a:endParaRPr lang="zh-TW" altLang="en-US"/>
@@ -2256,7 +2256,7 @@
           <a:p>
             <a:pPr lvl="0"/>
             <a:r>
-              <a:rPr lang="en-US" altLang="zh-TW" smtClean="0"/>
+              <a:rPr lang="en-US" altLang="zh-TW"/>
               <a:t>Edit Master text styles</a:t>
             </a:r>
           </a:p>
@@ -2279,7 +2279,7 @@
           <a:p>
             <a:fld id="{24D5CDFD-BD6B-479F-B265-2C7EDA856D3D}" type="datetimeFigureOut">
               <a:rPr lang="vi-VN" smtClean="0"/>
-              <a:t>08/07/2021</a:t>
+              <a:t>19/10/2024</a:t>
             </a:fld>
             <a:endParaRPr lang="vi-VN"/>
           </a:p>
@@ -2382,7 +2382,7 @@
           </a:lstStyle>
           <a:p>
             <a:r>
-              <a:rPr lang="en-US" altLang="zh-TW" smtClean="0"/>
+              <a:rPr lang="en-US" altLang="zh-TW"/>
               <a:t>Click to edit Master title style</a:t>
             </a:r>
             <a:endParaRPr lang="zh-TW" altLang="en-US"/>
@@ -2447,7 +2447,7 @@
           </a:lstStyle>
           <a:p>
             <a:r>
-              <a:rPr lang="en-US" altLang="zh-TW" smtClean="0"/>
+              <a:rPr lang="en-US" altLang="zh-TW"/>
               <a:t>Click icon to add picture</a:t>
             </a:r>
             <a:endParaRPr lang="zh-TW" altLang="en-US"/>
@@ -2513,7 +2513,7 @@
           <a:p>
             <a:pPr lvl="0"/>
             <a:r>
-              <a:rPr lang="en-US" altLang="zh-TW" smtClean="0"/>
+              <a:rPr lang="en-US" altLang="zh-TW"/>
               <a:t>Edit Master text styles</a:t>
             </a:r>
           </a:p>
@@ -2536,7 +2536,7 @@
           <a:p>
             <a:fld id="{24D5CDFD-BD6B-479F-B265-2C7EDA856D3D}" type="datetimeFigureOut">
               <a:rPr lang="vi-VN" smtClean="0"/>
-              <a:t>08/07/2021</a:t>
+              <a:t>19/10/2024</a:t>
             </a:fld>
             <a:endParaRPr lang="vi-VN"/>
           </a:p>
@@ -2650,10 +2650,9 @@
           <a:lstStyle/>
           <a:p>
             <a:r>
-              <a:rPr lang="zh-TW" altLang="en-US" smtClean="0"/>
+              <a:rPr lang="zh-TW" altLang="en-US"/>
               <a:t>按一下以編輯母片標題樣式</a:t>
             </a:r>
-            <a:endParaRPr lang="zh-TW" altLang="en-US"/>
           </a:p>
         </p:txBody>
       </p:sp>
@@ -2684,38 +2683,37 @@
           <a:p>
             <a:pPr lvl="0"/>
             <a:r>
-              <a:rPr lang="zh-TW" altLang="en-US" smtClean="0"/>
+              <a:rPr lang="zh-TW" altLang="en-US"/>
               <a:t>按一下以編輯母片文字樣式</a:t>
             </a:r>
           </a:p>
           <a:p>
             <a:pPr lvl="1"/>
             <a:r>
-              <a:rPr lang="zh-TW" altLang="en-US" smtClean="0"/>
+              <a:rPr lang="zh-TW" altLang="en-US"/>
               <a:t>第二層</a:t>
             </a:r>
           </a:p>
           <a:p>
             <a:pPr lvl="2"/>
             <a:r>
-              <a:rPr lang="zh-TW" altLang="en-US" smtClean="0"/>
+              <a:rPr lang="zh-TW" altLang="en-US"/>
               <a:t>第三層</a:t>
             </a:r>
           </a:p>
           <a:p>
             <a:pPr lvl="3"/>
             <a:r>
-              <a:rPr lang="zh-TW" altLang="en-US" smtClean="0"/>
+              <a:rPr lang="zh-TW" altLang="en-US"/>
               <a:t>第四層</a:t>
             </a:r>
           </a:p>
           <a:p>
             <a:pPr lvl="4"/>
             <a:r>
-              <a:rPr lang="zh-TW" altLang="en-US" smtClean="0"/>
+              <a:rPr lang="zh-TW" altLang="en-US"/>
               <a:t>第五層</a:t>
             </a:r>
-            <a:endParaRPr lang="zh-TW" altLang="en-US"/>
           </a:p>
         </p:txBody>
       </p:sp>
@@ -2754,7 +2752,7 @@
           <a:p>
             <a:fld id="{24D5CDFD-BD6B-479F-B265-2C7EDA856D3D}" type="datetimeFigureOut">
               <a:rPr lang="vi-VN" smtClean="0"/>
-              <a:t>08/07/2021</a:t>
+              <a:t>19/10/2024</a:t>
             </a:fld>
             <a:endParaRPr lang="vi-VN"/>
           </a:p>
@@ -3185,7 +3183,7 @@
               </a:rPr>
               <a:t>25</a:t>
             </a:r>
-            <a:r>
+            <a:br>
               <a:rPr lang="en-US" altLang="zh-CN" sz="7200" b="1" i="1" dirty="0">
                 <a:solidFill>
                   <a:srgbClr val="660033"/>
@@ -3200,12 +3198,11 @@
                 <a:latin typeface="微軟正黑體" pitchFamily="34" charset="-120"/>
                 <a:ea typeface="微軟正黑體" pitchFamily="34" charset="-120"/>
               </a:rPr>
-              <a:t/>
-            </a:r>
-            <a:br>
-              <a:rPr lang="en-US" altLang="zh-CN" sz="7200" b="1" i="1" dirty="0">
-                <a:solidFill>
-                  <a:srgbClr val="660033"/>
+            </a:br>
+            <a:r>
+              <a:rPr lang="zh-CN" altLang="en-US" sz="8000" b="1" dirty="0">
+                <a:solidFill>
+                  <a:srgbClr val="000066"/>
                 </a:solidFill>
                 <a:effectLst>
                   <a:outerShdw blurRad="38100" dist="38100" dir="2700000" algn="tl">
@@ -3217,40 +3214,7 @@
                 <a:latin typeface="微軟正黑體" pitchFamily="34" charset="-120"/>
                 <a:ea typeface="微軟正黑體" pitchFamily="34" charset="-120"/>
               </a:rPr>
-            </a:br>
-            <a:r>
-              <a:rPr lang="zh-CN" altLang="en-US" sz="8000" b="1" dirty="0">
-                <a:solidFill>
-                  <a:srgbClr val="000066"/>
-                </a:solidFill>
-                <a:effectLst>
-                  <a:outerShdw blurRad="38100" dist="38100" dir="2700000" algn="tl">
-                    <a:srgbClr val="000000">
-                      <a:alpha val="43137"/>
-                    </a:srgbClr>
-                  </a:outerShdw>
-                </a:effectLst>
-                <a:latin typeface="微軟正黑體" pitchFamily="34" charset="-120"/>
-                <a:ea typeface="微軟正黑體" pitchFamily="34" charset="-120"/>
-              </a:rPr>
-              <a:t>惟</a:t>
-            </a:r>
-            <a:r>
-              <a:rPr lang="zh-CN" altLang="en-US" sz="8000" b="1" dirty="0">
-                <a:solidFill>
-                  <a:srgbClr val="000066"/>
-                </a:solidFill>
-                <a:effectLst>
-                  <a:outerShdw blurRad="38100" dist="38100" dir="2700000" algn="tl">
-                    <a:srgbClr val="000000">
-                      <a:alpha val="43137"/>
-                    </a:srgbClr>
-                  </a:outerShdw>
-                </a:effectLst>
-                <a:latin typeface="微軟正黑體" pitchFamily="34" charset="-120"/>
-                <a:ea typeface="微軟正黑體" pitchFamily="34" charset="-120"/>
-              </a:rPr>
-              <a:t>獨耶穌</a:t>
+              <a:t>惟獨耶穌</a:t>
             </a:r>
             <a:endParaRPr lang="zh-TW" altLang="en-US" sz="8000" b="1" dirty="0">
               <a:solidFill>
@@ -3279,13 +3243,6 @@
   <p:clrMapOvr>
     <a:masterClrMapping/>
   </p:clrMapOvr>
-  <p:timing>
-    <p:tnLst>
-      <p:par>
-        <p:cTn id="1" dur="indefinite" restart="never" nodeType="tmRoot"/>
-      </p:par>
-    </p:tnLst>
-  </p:timing>
 </p:sld>
 </file>
 
@@ -3399,25 +3356,24 @@
                 </a:solidFill>
                 <a:effectLst/>
               </a:rPr>
-              <a:t>( </a:t>
+              <a:t>( 3</a:t>
             </a:r>
             <a:r>
               <a:rPr lang="en-US" sz="4800" b="1" dirty="0">
                 <a:solidFill>
                   <a:srgbClr val="000066"/>
                 </a:solidFill>
+              </a:rPr>
+              <a:t> / 5</a:t>
+            </a:r>
+            <a:r>
+              <a:rPr lang="en-US" sz="4800" b="1" dirty="0">
+                <a:solidFill>
+                  <a:srgbClr val="000066"/>
+                </a:solidFill>
                 <a:effectLst/>
               </a:rPr>
-              <a:t>3 </a:t>
-            </a:r>
-            <a:r>
-              <a:rPr lang="en-US" sz="4800" b="1" dirty="0">
-                <a:solidFill>
-                  <a:srgbClr val="000066"/>
-                </a:solidFill>
-                <a:effectLst/>
-              </a:rPr>
-              <a:t>)</a:t>
+              <a:t> )</a:t>
             </a:r>
             <a:endParaRPr lang="vi-VN" sz="4800" b="1" dirty="0">
               <a:solidFill>
@@ -3438,13 +3394,6 @@
   <p:clrMapOvr>
     <a:masterClrMapping/>
   </p:clrMapOvr>
-  <p:timing>
-    <p:tnLst>
-      <p:par>
-        <p:cTn id="1" dur="indefinite" restart="never" nodeType="tmRoot"/>
-      </p:par>
-    </p:tnLst>
-  </p:timing>
 </p:sld>
 </file>
 
@@ -3558,25 +3507,24 @@
                 </a:solidFill>
                 <a:effectLst/>
               </a:rPr>
-              <a:t>( </a:t>
+              <a:t>( 3</a:t>
             </a:r>
             <a:r>
               <a:rPr lang="en-US" sz="4800" b="1" dirty="0">
                 <a:solidFill>
                   <a:srgbClr val="000066"/>
                 </a:solidFill>
+              </a:rPr>
+              <a:t> / 5</a:t>
+            </a:r>
+            <a:r>
+              <a:rPr lang="en-US" sz="4800" b="1" dirty="0">
+                <a:solidFill>
+                  <a:srgbClr val="000066"/>
+                </a:solidFill>
                 <a:effectLst/>
               </a:rPr>
-              <a:t>3 </a:t>
-            </a:r>
-            <a:r>
-              <a:rPr lang="en-US" sz="4800" b="1" dirty="0">
-                <a:solidFill>
-                  <a:srgbClr val="000066"/>
-                </a:solidFill>
-                <a:effectLst/>
-              </a:rPr>
-              <a:t>)</a:t>
+              <a:t> )</a:t>
             </a:r>
             <a:endParaRPr lang="vi-VN" sz="4800" b="1" dirty="0">
               <a:solidFill>
@@ -3597,13 +3545,6 @@
   <p:clrMapOvr>
     <a:masterClrMapping/>
   </p:clrMapOvr>
-  <p:timing>
-    <p:tnLst>
-      <p:par>
-        <p:cTn id="1" dur="indefinite" restart="never" nodeType="tmRoot"/>
-      </p:par>
-    </p:tnLst>
-  </p:timing>
 </p:sld>
 </file>
 
@@ -3700,13 +3641,6 @@
   <p:clrMapOvr>
     <a:masterClrMapping/>
   </p:clrMapOvr>
-  <p:timing>
-    <p:tnLst>
-      <p:par>
-        <p:cTn id="1" dur="indefinite" restart="never" nodeType="tmRoot"/>
-      </p:par>
-    </p:tnLst>
-  </p:timing>
 </p:sld>
 </file>
 
@@ -3803,13 +3737,6 @@
   <p:clrMapOvr>
     <a:masterClrMapping/>
   </p:clrMapOvr>
-  <p:timing>
-    <p:tnLst>
-      <p:par>
-        <p:cTn id="1" dur="indefinite" restart="never" nodeType="tmRoot"/>
-      </p:par>
-    </p:tnLst>
-  </p:timing>
 </p:sld>
 </file>
 
@@ -3923,25 +3850,24 @@
                 </a:solidFill>
                 <a:effectLst/>
               </a:rPr>
-              <a:t>( </a:t>
+              <a:t>( 4</a:t>
             </a:r>
             <a:r>
               <a:rPr lang="en-US" sz="4800" b="1" dirty="0">
                 <a:solidFill>
                   <a:srgbClr val="000066"/>
                 </a:solidFill>
+              </a:rPr>
+              <a:t> / 5</a:t>
+            </a:r>
+            <a:r>
+              <a:rPr lang="en-US" sz="4800" b="1" dirty="0">
+                <a:solidFill>
+                  <a:srgbClr val="000066"/>
+                </a:solidFill>
                 <a:effectLst/>
               </a:rPr>
-              <a:t>4 </a:t>
-            </a:r>
-            <a:r>
-              <a:rPr lang="en-US" sz="4800" b="1" dirty="0">
-                <a:solidFill>
-                  <a:srgbClr val="000066"/>
-                </a:solidFill>
-                <a:effectLst/>
-              </a:rPr>
-              <a:t>)</a:t>
+              <a:t> )</a:t>
             </a:r>
             <a:endParaRPr lang="vi-VN" sz="4800" b="1" dirty="0">
               <a:solidFill>
@@ -3962,13 +3888,6 @@
   <p:clrMapOvr>
     <a:masterClrMapping/>
   </p:clrMapOvr>
-  <p:timing>
-    <p:tnLst>
-      <p:par>
-        <p:cTn id="1" dur="indefinite" restart="never" nodeType="tmRoot"/>
-      </p:par>
-    </p:tnLst>
-  </p:timing>
 </p:sld>
 </file>
 
@@ -4082,25 +4001,24 @@
                 </a:solidFill>
                 <a:effectLst/>
               </a:rPr>
-              <a:t>( </a:t>
+              <a:t>( 4</a:t>
             </a:r>
             <a:r>
               <a:rPr lang="en-US" sz="4800" b="1" dirty="0">
                 <a:solidFill>
                   <a:srgbClr val="000066"/>
                 </a:solidFill>
+              </a:rPr>
+              <a:t> / 5</a:t>
+            </a:r>
+            <a:r>
+              <a:rPr lang="en-US" sz="4800" b="1" dirty="0">
+                <a:solidFill>
+                  <a:srgbClr val="000066"/>
+                </a:solidFill>
                 <a:effectLst/>
               </a:rPr>
-              <a:t>4 </a:t>
-            </a:r>
-            <a:r>
-              <a:rPr lang="en-US" sz="4800" b="1" dirty="0">
-                <a:solidFill>
-                  <a:srgbClr val="000066"/>
-                </a:solidFill>
-                <a:effectLst/>
-              </a:rPr>
-              <a:t>)</a:t>
+              <a:t> )</a:t>
             </a:r>
             <a:endParaRPr lang="vi-VN" sz="4800" b="1" dirty="0">
               <a:solidFill>
@@ -4121,13 +4039,6 @@
   <p:clrMapOvr>
     <a:masterClrMapping/>
   </p:clrMapOvr>
-  <p:timing>
-    <p:tnLst>
-      <p:par>
-        <p:cTn id="1" dur="indefinite" restart="never" nodeType="tmRoot"/>
-      </p:par>
-    </p:tnLst>
-  </p:timing>
 </p:sld>
 </file>
 
@@ -4224,13 +4135,6 @@
   <p:clrMapOvr>
     <a:masterClrMapping/>
   </p:clrMapOvr>
-  <p:timing>
-    <p:tnLst>
-      <p:par>
-        <p:cTn id="1" dur="indefinite" restart="never" nodeType="tmRoot"/>
-      </p:par>
-    </p:tnLst>
-  </p:timing>
 </p:sld>
 </file>
 
@@ -4327,13 +4231,6 @@
   <p:clrMapOvr>
     <a:masterClrMapping/>
   </p:clrMapOvr>
-  <p:timing>
-    <p:tnLst>
-      <p:par>
-        <p:cTn id="1" dur="indefinite" restart="never" nodeType="tmRoot"/>
-      </p:par>
-    </p:tnLst>
-  </p:timing>
 </p:sld>
 </file>
 
@@ -4447,25 +4344,24 @@
                 </a:solidFill>
                 <a:effectLst/>
               </a:rPr>
-              <a:t>( </a:t>
+              <a:t>( 5</a:t>
             </a:r>
             <a:r>
               <a:rPr lang="en-US" sz="4800" b="1" dirty="0">
                 <a:solidFill>
                   <a:srgbClr val="000066"/>
                 </a:solidFill>
+              </a:rPr>
+              <a:t> / 5</a:t>
+            </a:r>
+            <a:r>
+              <a:rPr lang="en-US" sz="4800" b="1" dirty="0">
+                <a:solidFill>
+                  <a:srgbClr val="000066"/>
+                </a:solidFill>
                 <a:effectLst/>
               </a:rPr>
-              <a:t>5 </a:t>
-            </a:r>
-            <a:r>
-              <a:rPr lang="en-US" sz="4800" b="1" dirty="0">
-                <a:solidFill>
-                  <a:srgbClr val="000066"/>
-                </a:solidFill>
-                <a:effectLst/>
-              </a:rPr>
-              <a:t>)</a:t>
+              <a:t> )</a:t>
             </a:r>
             <a:endParaRPr lang="vi-VN" sz="4800" b="1" dirty="0">
               <a:solidFill>
@@ -4486,13 +4382,6 @@
   <p:clrMapOvr>
     <a:masterClrMapping/>
   </p:clrMapOvr>
-  <p:timing>
-    <p:tnLst>
-      <p:par>
-        <p:cTn id="1" dur="indefinite" restart="never" nodeType="tmRoot"/>
-      </p:par>
-    </p:tnLst>
-  </p:timing>
 </p:sld>
 </file>
 
@@ -4606,25 +4495,24 @@
                 </a:solidFill>
                 <a:effectLst/>
               </a:rPr>
-              <a:t>( </a:t>
+              <a:t>( 5</a:t>
             </a:r>
             <a:r>
               <a:rPr lang="en-US" sz="4800" b="1" dirty="0">
                 <a:solidFill>
                   <a:srgbClr val="000066"/>
                 </a:solidFill>
+              </a:rPr>
+              <a:t> / 5</a:t>
+            </a:r>
+            <a:r>
+              <a:rPr lang="en-US" sz="4800" b="1" dirty="0">
+                <a:solidFill>
+                  <a:srgbClr val="000066"/>
+                </a:solidFill>
                 <a:effectLst/>
               </a:rPr>
-              <a:t>5 </a:t>
-            </a:r>
-            <a:r>
-              <a:rPr lang="en-US" sz="4800" b="1" dirty="0">
-                <a:solidFill>
-                  <a:srgbClr val="000066"/>
-                </a:solidFill>
-                <a:effectLst/>
-              </a:rPr>
-              <a:t>)</a:t>
+              <a:t> )</a:t>
             </a:r>
             <a:endParaRPr lang="vi-VN" sz="4800" b="1" dirty="0">
               <a:solidFill>
@@ -4645,13 +4533,6 @@
   <p:clrMapOvr>
     <a:masterClrMapping/>
   </p:clrMapOvr>
-  <p:timing>
-    <p:tnLst>
-      <p:par>
-        <p:cTn id="1" dur="indefinite" restart="never" nodeType="tmRoot"/>
-      </p:par>
-    </p:tnLst>
-  </p:timing>
 </p:sld>
 </file>
 
@@ -4765,7 +4646,24 @@
                 </a:solidFill>
                 <a:effectLst/>
               </a:rPr>
-              <a:t>( 1 )</a:t>
+              <a:t>( 1</a:t>
+            </a:r>
+            <a:r>
+              <a:rPr lang="en-US" sz="4800" b="1" dirty="0">
+                <a:solidFill>
+                  <a:srgbClr val="000066"/>
+                </a:solidFill>
+              </a:rPr>
+              <a:t> / 5</a:t>
+            </a:r>
+            <a:r>
+              <a:rPr lang="en-US" sz="4800" b="1" dirty="0">
+                <a:solidFill>
+                  <a:srgbClr val="000066"/>
+                </a:solidFill>
+                <a:effectLst/>
+              </a:rPr>
+              <a:t> )</a:t>
             </a:r>
             <a:endParaRPr lang="vi-VN" sz="4800" b="1" dirty="0">
               <a:solidFill>
@@ -4786,13 +4684,6 @@
   <p:clrMapOvr>
     <a:masterClrMapping/>
   </p:clrMapOvr>
-  <p:timing>
-    <p:tnLst>
-      <p:par>
-        <p:cTn id="1" dur="indefinite" restart="never" nodeType="tmRoot"/>
-      </p:par>
-    </p:tnLst>
-  </p:timing>
 </p:sld>
 </file>
 
@@ -4889,13 +4780,6 @@
   <p:clrMapOvr>
     <a:masterClrMapping/>
   </p:clrMapOvr>
-  <p:timing>
-    <p:tnLst>
-      <p:par>
-        <p:cTn id="1" dur="indefinite" restart="never" nodeType="tmRoot"/>
-      </p:par>
-    </p:tnLst>
-  </p:timing>
 </p:sld>
 </file>
 
@@ -4992,13 +4876,6 @@
   <p:clrMapOvr>
     <a:masterClrMapping/>
   </p:clrMapOvr>
-  <p:timing>
-    <p:tnLst>
-      <p:par>
-        <p:cTn id="1" dur="indefinite" restart="never" nodeType="tmRoot"/>
-      </p:par>
-    </p:tnLst>
-  </p:timing>
 </p:sld>
 </file>
 
@@ -5112,7 +4989,24 @@
                 </a:solidFill>
                 <a:effectLst/>
               </a:rPr>
-              <a:t>( 1 )</a:t>
+              <a:t>( 1</a:t>
+            </a:r>
+            <a:r>
+              <a:rPr lang="en-US" sz="4800" b="1" dirty="0">
+                <a:solidFill>
+                  <a:srgbClr val="000066"/>
+                </a:solidFill>
+              </a:rPr>
+              <a:t> / 5</a:t>
+            </a:r>
+            <a:r>
+              <a:rPr lang="en-US" sz="4800" b="1" dirty="0">
+                <a:solidFill>
+                  <a:srgbClr val="000066"/>
+                </a:solidFill>
+                <a:effectLst/>
+              </a:rPr>
+              <a:t> )</a:t>
             </a:r>
             <a:endParaRPr lang="vi-VN" sz="4800" b="1" dirty="0">
               <a:solidFill>
@@ -5133,13 +5027,6 @@
   <p:clrMapOvr>
     <a:masterClrMapping/>
   </p:clrMapOvr>
-  <p:timing>
-    <p:tnLst>
-      <p:par>
-        <p:cTn id="1" dur="indefinite" restart="never" nodeType="tmRoot"/>
-      </p:par>
-    </p:tnLst>
-  </p:timing>
 </p:sld>
 </file>
 
@@ -5236,13 +5123,6 @@
   <p:clrMapOvr>
     <a:masterClrMapping/>
   </p:clrMapOvr>
-  <p:timing>
-    <p:tnLst>
-      <p:par>
-        <p:cTn id="1" dur="indefinite" restart="never" nodeType="tmRoot"/>
-      </p:par>
-    </p:tnLst>
-  </p:timing>
 </p:sld>
 </file>
 
@@ -5339,13 +5219,6 @@
   <p:clrMapOvr>
     <a:masterClrMapping/>
   </p:clrMapOvr>
-  <p:timing>
-    <p:tnLst>
-      <p:par>
-        <p:cTn id="1" dur="indefinite" restart="never" nodeType="tmRoot"/>
-      </p:par>
-    </p:tnLst>
-  </p:timing>
 </p:sld>
 </file>
 
@@ -5459,25 +5332,24 @@
                 </a:solidFill>
                 <a:effectLst/>
               </a:rPr>
-              <a:t>( </a:t>
+              <a:t>( 2</a:t>
             </a:r>
             <a:r>
               <a:rPr lang="en-US" sz="4800" b="1" dirty="0">
                 <a:solidFill>
                   <a:srgbClr val="000066"/>
                 </a:solidFill>
+              </a:rPr>
+              <a:t> / 5</a:t>
+            </a:r>
+            <a:r>
+              <a:rPr lang="en-US" sz="4800" b="1" dirty="0">
+                <a:solidFill>
+                  <a:srgbClr val="000066"/>
+                </a:solidFill>
                 <a:effectLst/>
               </a:rPr>
-              <a:t>2 </a:t>
-            </a:r>
-            <a:r>
-              <a:rPr lang="en-US" sz="4800" b="1" dirty="0">
-                <a:solidFill>
-                  <a:srgbClr val="000066"/>
-                </a:solidFill>
-                <a:effectLst/>
-              </a:rPr>
-              <a:t>)</a:t>
+              <a:t> )</a:t>
             </a:r>
             <a:endParaRPr lang="vi-VN" sz="4800" b="1" dirty="0">
               <a:solidFill>
@@ -5498,13 +5370,6 @@
   <p:clrMapOvr>
     <a:masterClrMapping/>
   </p:clrMapOvr>
-  <p:timing>
-    <p:tnLst>
-      <p:par>
-        <p:cTn id="1" dur="indefinite" restart="never" nodeType="tmRoot"/>
-      </p:par>
-    </p:tnLst>
-  </p:timing>
 </p:sld>
 </file>
 
@@ -5618,25 +5483,24 @@
                 </a:solidFill>
                 <a:effectLst/>
               </a:rPr>
-              <a:t>( </a:t>
+              <a:t>( 2</a:t>
             </a:r>
             <a:r>
               <a:rPr lang="en-US" sz="4800" b="1" dirty="0">
                 <a:solidFill>
                   <a:srgbClr val="000066"/>
                 </a:solidFill>
+              </a:rPr>
+              <a:t> / 5</a:t>
+            </a:r>
+            <a:r>
+              <a:rPr lang="en-US" sz="4800" b="1" dirty="0">
+                <a:solidFill>
+                  <a:srgbClr val="000066"/>
+                </a:solidFill>
                 <a:effectLst/>
               </a:rPr>
-              <a:t>2 </a:t>
-            </a:r>
-            <a:r>
-              <a:rPr lang="en-US" sz="4800" b="1" dirty="0">
-                <a:solidFill>
-                  <a:srgbClr val="000066"/>
-                </a:solidFill>
-                <a:effectLst/>
-              </a:rPr>
-              <a:t>)</a:t>
+              <a:t> )</a:t>
             </a:r>
             <a:endParaRPr lang="vi-VN" sz="4800" b="1" dirty="0">
               <a:solidFill>
@@ -5657,13 +5521,6 @@
   <p:clrMapOvr>
     <a:masterClrMapping/>
   </p:clrMapOvr>
-  <p:timing>
-    <p:tnLst>
-      <p:par>
-        <p:cTn id="1" dur="indefinite" restart="never" nodeType="tmRoot"/>
-      </p:par>
-    </p:tnLst>
-  </p:timing>
 </p:sld>
 </file>
 
@@ -5760,13 +5617,6 @@
   <p:clrMapOvr>
     <a:masterClrMapping/>
   </p:clrMapOvr>
-  <p:timing>
-    <p:tnLst>
-      <p:par>
-        <p:cTn id="1" dur="indefinite" restart="never" nodeType="tmRoot"/>
-      </p:par>
-    </p:tnLst>
-  </p:timing>
 </p:sld>
 </file>
 
@@ -5863,13 +5713,6 @@
   <p:clrMapOvr>
     <a:masterClrMapping/>
   </p:clrMapOvr>
-  <p:timing>
-    <p:tnLst>
-      <p:par>
-        <p:cTn id="1" dur="indefinite" restart="never" nodeType="tmRoot"/>
-      </p:par>
-    </p:tnLst>
-  </p:timing>
 </p:sld>
 </file>
 
